--- a/生成AI日報エージェント_アーキテクチャ.pptx
+++ b/生成AI日報エージェント_アーキテクチャ.pptx
@@ -3084,7 +3084,7 @@
     <p:bg>
       <p:bgPr>
         <a:solidFill>
-          <a:srgbClr val="F4F7FB"/>
+          <a:srgbClr val="0D1B2A"/>
         </a:solidFill>
         <a:effectLst/>
       </p:bgPr>
@@ -3105,16 +3105,18 @@
         <p:spPr>
           <a:xfrm>
             <a:off x="0" y="0"/>
-            <a:ext cx="12188952" cy="640080"/>
+            <a:ext cx="12188952" cy="475488"/>
           </a:xfrm>
           <a:prstGeom prst="rect">
             <a:avLst/>
           </a:prstGeom>
           <a:solidFill>
-            <a:srgbClr val="1B2A4A"/>
+            <a:srgbClr val="16283D"/>
           </a:solidFill>
-          <a:ln>
-            <a:noFill/>
+          <a:ln w="6350">
+            <a:solidFill>
+              <a:srgbClr val="2A4565"/>
+            </a:solidFill>
           </a:ln>
         </p:spPr>
         <p:style>
@@ -3132,41 +3134,105 @@
           </a:fontRef>
         </p:style>
         <p:txBody>
-          <a:bodyPr rtlCol="0" anchor="ctr" wrap="square"/>
+          <a:bodyPr rtlCol="0" anchor="ctr"/>
           <a:lstStyle/>
           <a:p>
             <a:pPr algn="ctr"/>
-            <a:r>
-              <a:rPr sz="2000" b="1">
-                <a:solidFill>
-                  <a:srgbClr val="FFFFFF"/>
-                </a:solidFill>
-              </a:rPr>
-              <a:t>生成AI日報エージェント  —  ITアーキテクチャ</a:t>
-            </a:r>
-          </a:p>
-        </p:txBody>
-      </p:sp>
-      <p:sp>
-        <p:nvSpPr>
-          <p:cNvPr id="3" name="Rectangle 2"/>
-          <p:cNvSpPr/>
+          </a:p>
+        </p:txBody>
+      </p:sp>
+      <p:sp>
+        <p:nvSpPr>
+          <p:cNvPr id="3" name="TextBox 2"/>
+          <p:cNvSpPr txBox="1"/>
           <p:nvPr/>
         </p:nvSpPr>
         <p:spPr>
           <a:xfrm>
-            <a:off x="182880" y="777240"/>
-            <a:ext cx="2926080" cy="5303520"/>
+            <a:off x="137160" y="64008"/>
+            <a:ext cx="8229600" cy="347472"/>
           </a:xfrm>
           <a:prstGeom prst="rect">
             <a:avLst/>
           </a:prstGeom>
+          <a:noFill/>
+        </p:spPr>
+        <p:txBody>
+          <a:bodyPr wrap="square">
+            <a:spAutoFit/>
+          </a:bodyPr>
+          <a:lstStyle/>
+          <a:p>
+            <a:pPr algn="l"/>
+            <a:r>
+              <a:rPr sz="1700" b="1">
+                <a:solidFill>
+                  <a:srgbClr val="FFFFFF"/>
+                </a:solidFill>
+                <a:latin typeface="Meiryo UI"/>
+              </a:rPr>
+              <a:t>生成AI日報エージェント  —  ITアーキテクチャ（エンジニア向け）</a:t>
+            </a:r>
+          </a:p>
+        </p:txBody>
+      </p:sp>
+      <p:sp>
+        <p:nvSpPr>
+          <p:cNvPr id="4" name="TextBox 3"/>
+          <p:cNvSpPr txBox="1"/>
+          <p:nvPr/>
+        </p:nvSpPr>
+        <p:spPr>
+          <a:xfrm>
+            <a:off x="9144000" y="64008"/>
+            <a:ext cx="2743200" cy="347472"/>
+          </a:xfrm>
+          <a:prstGeom prst="rect">
+            <a:avLst/>
+          </a:prstGeom>
+          <a:noFill/>
+        </p:spPr>
+        <p:txBody>
+          <a:bodyPr wrap="square">
+            <a:spAutoFit/>
+          </a:bodyPr>
+          <a:lstStyle/>
+          <a:p>
+            <a:pPr algn="r"/>
+            <a:r>
+              <a:rPr sz="900" b="0">
+                <a:solidFill>
+                  <a:srgbClr val="8AA8C0"/>
+                </a:solidFill>
+                <a:latin typeface="Meiryo UI"/>
+              </a:rPr>
+              <a:t>Python 3.12  |  GitHub Actions</a:t>
+            </a:r>
+          </a:p>
+        </p:txBody>
+      </p:sp>
+      <p:sp>
+        <p:nvSpPr>
+          <p:cNvPr id="5" name="Rectangle 4"/>
+          <p:cNvSpPr/>
+          <p:nvPr/>
+        </p:nvSpPr>
+        <p:spPr>
+          <a:xfrm>
+            <a:off x="109728" y="566928"/>
+            <a:ext cx="2606040" cy="5669280"/>
+          </a:xfrm>
+          <a:prstGeom prst="roundRect">
+            <a:avLst>
+              <a:gd name="adj" fmla="val 12000"/>
+            </a:avLst>
+          </a:prstGeom>
           <a:solidFill>
-            <a:srgbClr val="E3EAF8"/>
+            <a:srgbClr val="16283D"/>
           </a:solidFill>
-          <a:ln w="12700">
+          <a:ln w="10160">
             <a:solidFill>
-              <a:srgbClr val="BBCCEE"/>
+              <a:srgbClr val="298FFF"/>
             </a:solidFill>
           </a:ln>
         </p:spPr>
@@ -3194,14 +3260,14 @@
       </p:sp>
       <p:sp>
         <p:nvSpPr>
-          <p:cNvPr id="4" name="TextBox 3"/>
+          <p:cNvPr id="6" name="TextBox 5"/>
           <p:cNvSpPr txBox="1"/>
           <p:nvPr/>
         </p:nvSpPr>
         <p:spPr>
           <a:xfrm>
-            <a:off x="274320" y="804672"/>
-            <a:ext cx="2286000" cy="274320"/>
+            <a:off x="201168" y="594360"/>
+            <a:ext cx="2286000" cy="256032"/>
           </a:xfrm>
           <a:prstGeom prst="rect">
             <a:avLst/>
@@ -3214,38 +3280,41 @@
           </a:bodyPr>
           <a:lstStyle/>
           <a:p>
-            <a:pPr algn="ctr"/>
-            <a:r>
-              <a:rPr sz="900" b="1">
-                <a:solidFill>
-                  <a:srgbClr val="2E6EC8"/>
-                </a:solidFill>
-              </a:rPr>
-              <a:t>📡  入力（RSSフィード）</a:t>
-            </a:r>
-          </a:p>
-        </p:txBody>
-      </p:sp>
-      <p:sp>
-        <p:nvSpPr>
-          <p:cNvPr id="5" name="Rectangle 4"/>
+            <a:pPr algn="l"/>
+            <a:r>
+              <a:rPr sz="750" b="1">
+                <a:solidFill>
+                  <a:srgbClr val="298FFF"/>
+                </a:solidFill>
+                <a:latin typeface="Meiryo UI"/>
+              </a:rPr>
+              <a:t>INPUT  /  RSS Feeds</a:t>
+            </a:r>
+          </a:p>
+        </p:txBody>
+      </p:sp>
+      <p:sp>
+        <p:nvSpPr>
+          <p:cNvPr id="7" name="Rectangle 6"/>
           <p:cNvSpPr/>
           <p:nvPr/>
         </p:nvSpPr>
         <p:spPr>
           <a:xfrm>
-            <a:off x="3337560" y="777240"/>
-            <a:ext cx="3474720" cy="5303520"/>
-          </a:xfrm>
-          <a:prstGeom prst="rect">
-            <a:avLst/>
+            <a:off x="2926080" y="566928"/>
+            <a:ext cx="3931920" cy="5669280"/>
+          </a:xfrm>
+          <a:prstGeom prst="roundRect">
+            <a:avLst>
+              <a:gd name="adj" fmla="val 12000"/>
+            </a:avLst>
           </a:prstGeom>
           <a:solidFill>
-            <a:srgbClr val="E8F5E9"/>
+            <a:srgbClr val="16283D"/>
           </a:solidFill>
-          <a:ln w="12700">
+          <a:ln w="10160">
             <a:solidFill>
-              <a:srgbClr val="BBDDBB"/>
+              <a:srgbClr val="00C87A"/>
             </a:solidFill>
           </a:ln>
         </p:spPr>
@@ -3273,14 +3342,14 @@
       </p:sp>
       <p:sp>
         <p:nvSpPr>
-          <p:cNvPr id="6" name="TextBox 5"/>
+          <p:cNvPr id="8" name="TextBox 7"/>
           <p:cNvSpPr txBox="1"/>
           <p:nvPr/>
         </p:nvSpPr>
         <p:spPr>
           <a:xfrm>
-            <a:off x="3429000" y="804672"/>
-            <a:ext cx="2926080" cy="274320"/>
+            <a:off x="3017520" y="594360"/>
+            <a:ext cx="3474720" cy="256032"/>
           </a:xfrm>
           <a:prstGeom prst="rect">
             <a:avLst/>
@@ -3293,38 +3362,41 @@
           </a:bodyPr>
           <a:lstStyle/>
           <a:p>
-            <a:pPr algn="ctr"/>
-            <a:r>
-              <a:rPr sz="900" b="1">
-                <a:solidFill>
-                  <a:srgbClr val="2E7D32"/>
-                </a:solidFill>
-              </a:rPr>
-              <a:t>⚙️  処理（news_agent.py）</a:t>
-            </a:r>
-          </a:p>
-        </p:txBody>
-      </p:sp>
-      <p:sp>
-        <p:nvSpPr>
-          <p:cNvPr id="7" name="Rectangle 6"/>
+            <a:pPr algn="l"/>
+            <a:r>
+              <a:rPr sz="750" b="1">
+                <a:solidFill>
+                  <a:srgbClr val="00C87A"/>
+                </a:solidFill>
+                <a:latin typeface="Meiryo UI"/>
+              </a:rPr>
+              <a:t>PROCESSING  /  news_agent.py</a:t>
+            </a:r>
+          </a:p>
+        </p:txBody>
+      </p:sp>
+      <p:sp>
+        <p:nvSpPr>
+          <p:cNvPr id="9" name="Rectangle 8"/>
           <p:cNvSpPr/>
           <p:nvPr/>
         </p:nvSpPr>
         <p:spPr>
           <a:xfrm>
-            <a:off x="8869680" y="777240"/>
-            <a:ext cx="3108960" cy="5303520"/>
-          </a:xfrm>
-          <a:prstGeom prst="rect">
-            <a:avLst/>
+            <a:off x="8887968" y="566928"/>
+            <a:ext cx="3200400" cy="5669280"/>
+          </a:xfrm>
+          <a:prstGeom prst="roundRect">
+            <a:avLst>
+              <a:gd name="adj" fmla="val 12000"/>
+            </a:avLst>
           </a:prstGeom>
           <a:solidFill>
-            <a:srgbClr val="FFF3E0"/>
+            <a:srgbClr val="16283D"/>
           </a:solidFill>
-          <a:ln w="12700">
+          <a:ln w="10160">
             <a:solidFill>
-              <a:srgbClr val="EECCAA"/>
+              <a:srgbClr val="FF7A00"/>
             </a:solidFill>
           </a:ln>
         </p:spPr>
@@ -3352,14 +3424,14 @@
       </p:sp>
       <p:sp>
         <p:nvSpPr>
-          <p:cNvPr id="8" name="TextBox 7"/>
+          <p:cNvPr id="10" name="TextBox 9"/>
           <p:cNvSpPr txBox="1"/>
           <p:nvPr/>
         </p:nvSpPr>
         <p:spPr>
           <a:xfrm>
-            <a:off x="8961120" y="804672"/>
-            <a:ext cx="2743200" cy="274320"/>
+            <a:off x="8979408" y="594360"/>
+            <a:ext cx="2743200" cy="256032"/>
           </a:xfrm>
           <a:prstGeom prst="rect">
             <a:avLst/>
@@ -3372,39 +3444,42 @@
           </a:bodyPr>
           <a:lstStyle/>
           <a:p>
-            <a:pPr algn="ctr"/>
-            <a:r>
-              <a:rPr sz="900" b="1">
-                <a:solidFill>
-                  <a:srgbClr val="F57C00"/>
-                </a:solidFill>
-              </a:rPr>
-              <a:t>📤  出力</a:t>
-            </a:r>
-          </a:p>
-        </p:txBody>
-      </p:sp>
-      <p:sp>
-        <p:nvSpPr>
-          <p:cNvPr id="9" name="Rectangle 8"/>
+            <a:pPr algn="l"/>
+            <a:r>
+              <a:rPr sz="750" b="1">
+                <a:solidFill>
+                  <a:srgbClr val="FF7A00"/>
+                </a:solidFill>
+                <a:latin typeface="Meiryo UI"/>
+              </a:rPr>
+              <a:t>OUTPUT  /  Gmail SMTP</a:t>
+            </a:r>
+          </a:p>
+        </p:txBody>
+      </p:sp>
+      <p:sp>
+        <p:nvSpPr>
+          <p:cNvPr id="11" name="Rectangle 10"/>
           <p:cNvSpPr/>
           <p:nvPr/>
         </p:nvSpPr>
         <p:spPr>
           <a:xfrm>
-            <a:off x="320040" y="1234440"/>
-            <a:ext cx="2651760" cy="594360"/>
+            <a:off x="201168" y="960120"/>
+            <a:ext cx="2423160" cy="594360"/>
           </a:xfrm>
           <a:prstGeom prst="roundRect">
             <a:avLst>
-              <a:gd name="adj" fmla="val 20000"/>
+              <a:gd name="adj" fmla="val 10000"/>
             </a:avLst>
           </a:prstGeom>
           <a:solidFill>
-            <a:srgbClr val="2E6EC8"/>
+            <a:srgbClr val="0A3560"/>
           </a:solidFill>
-          <a:ln>
-            <a:noFill/>
+          <a:ln w="10160">
+            <a:solidFill>
+              <a:srgbClr val="298FFF"/>
+            </a:solidFill>
           </a:ln>
         </p:spPr>
         <p:style>
@@ -3425,40 +3500,54 @@
           <a:bodyPr rtlCol="0" anchor="ctr" wrap="square"/>
           <a:lstStyle/>
           <a:p>
-            <a:pPr algn="ctr"/>
-            <a:r>
-              <a:rPr sz="950" b="0">
-                <a:solidFill>
-                  <a:srgbClr val="FFFFFF"/>
-                </a:solidFill>
-              </a:rPr>
-              <a:t>Google News
-生成AI</a:t>
-            </a:r>
-          </a:p>
-        </p:txBody>
-      </p:sp>
-      <p:sp>
-        <p:nvSpPr>
-          <p:cNvPr id="10" name="Rectangle 9"/>
+            <a:pPr algn="l"/>
+            <a:r>
+              <a:rPr sz="900" b="1">
+                <a:solidFill>
+                  <a:srgbClr val="298FFF"/>
+                </a:solidFill>
+                <a:latin typeface="Meiryo UI"/>
+              </a:rPr>
+              <a:t>Google News</a:t>
+            </a:r>
+          </a:p>
+          <a:p>
+            <a:pPr algn="l"/>
+            <a:r>
+              <a:rPr sz="700" b="0">
+                <a:solidFill>
+                  <a:srgbClr val="8AA8C0"/>
+                </a:solidFill>
+                <a:latin typeface="Meiryo UI"/>
+              </a:rPr>
+              <a:t>q=生成AI&amp;hl=ja&amp;gl=JP</a:t>
+            </a:r>
+          </a:p>
+        </p:txBody>
+      </p:sp>
+      <p:sp>
+        <p:nvSpPr>
+          <p:cNvPr id="12" name="Rectangle 11"/>
           <p:cNvSpPr/>
           <p:nvPr/>
         </p:nvSpPr>
         <p:spPr>
           <a:xfrm>
-            <a:off x="320040" y="2057400"/>
-            <a:ext cx="2651760" cy="777240"/>
+            <a:off x="201168" y="1691640"/>
+            <a:ext cx="2423160" cy="594360"/>
           </a:xfrm>
           <a:prstGeom prst="roundRect">
             <a:avLst>
-              <a:gd name="adj" fmla="val 20000"/>
+              <a:gd name="adj" fmla="val 10000"/>
             </a:avLst>
           </a:prstGeom>
           <a:solidFill>
-            <a:srgbClr val="2E6EC8"/>
+            <a:srgbClr val="0A3560"/>
           </a:solidFill>
-          <a:ln>
-            <a:noFill/>
+          <a:ln w="10160">
+            <a:solidFill>
+              <a:srgbClr val="298FFF"/>
+            </a:solidFill>
           </a:ln>
         </p:spPr>
         <p:style>
@@ -3479,41 +3568,54 @@
           <a:bodyPr rtlCol="0" anchor="ctr" wrap="square"/>
           <a:lstStyle/>
           <a:p>
-            <a:pPr algn="ctr"/>
-            <a:r>
-              <a:rPr sz="950" b="0">
-                <a:solidFill>
-                  <a:srgbClr val="FFFFFF"/>
-                </a:solidFill>
-              </a:rPr>
-              <a:t>Google News
-ChatGPT/Claude
-/Gemini/LLM</a:t>
-            </a:r>
-          </a:p>
-        </p:txBody>
-      </p:sp>
-      <p:sp>
-        <p:nvSpPr>
-          <p:cNvPr id="11" name="Rectangle 10"/>
+            <a:pPr algn="l"/>
+            <a:r>
+              <a:rPr sz="900" b="1">
+                <a:solidFill>
+                  <a:srgbClr val="298FFF"/>
+                </a:solidFill>
+                <a:latin typeface="Meiryo UI"/>
+              </a:rPr>
+              <a:t>Google News</a:t>
+            </a:r>
+          </a:p>
+          <a:p>
+            <a:pPr algn="l"/>
+            <a:r>
+              <a:rPr sz="700" b="0">
+                <a:solidFill>
+                  <a:srgbClr val="8AA8C0"/>
+                </a:solidFill>
+                <a:latin typeface="Meiryo UI"/>
+              </a:rPr>
+              <a:t>q=ChatGPT OR Claude OR Gemini OR LLM</a:t>
+            </a:r>
+          </a:p>
+        </p:txBody>
+      </p:sp>
+      <p:sp>
+        <p:nvSpPr>
+          <p:cNvPr id="13" name="Rectangle 12"/>
           <p:cNvSpPr/>
           <p:nvPr/>
         </p:nvSpPr>
         <p:spPr>
           <a:xfrm>
-            <a:off x="320040" y="3154680"/>
-            <a:ext cx="2651760" cy="594360"/>
+            <a:off x="201168" y="2560320"/>
+            <a:ext cx="2423160" cy="594360"/>
           </a:xfrm>
           <a:prstGeom prst="roundRect">
             <a:avLst>
-              <a:gd name="adj" fmla="val 20000"/>
+              <a:gd name="adj" fmla="val 10000"/>
             </a:avLst>
           </a:prstGeom>
           <a:solidFill>
-            <a:srgbClr val="2E6EC8"/>
+            <a:srgbClr val="0A3560"/>
           </a:solidFill>
-          <a:ln>
-            <a:noFill/>
+          <a:ln w="10160">
+            <a:solidFill>
+              <a:srgbClr val="298FFF"/>
+            </a:solidFill>
           </a:ln>
         </p:spPr>
         <p:style>
@@ -3534,39 +3636,54 @@
           <a:bodyPr rtlCol="0" anchor="ctr" wrap="square"/>
           <a:lstStyle/>
           <a:p>
-            <a:pPr algn="ctr"/>
-            <a:r>
-              <a:rPr sz="950" b="0">
-                <a:solidFill>
-                  <a:srgbClr val="FFFFFF"/>
-                </a:solidFill>
+            <a:pPr algn="l"/>
+            <a:r>
+              <a:rPr sz="900" b="1">
+                <a:solidFill>
+                  <a:srgbClr val="298FFF"/>
+                </a:solidFill>
+                <a:latin typeface="Meiryo UI"/>
               </a:rPr>
               <a:t>ITmedia NEWS</a:t>
             </a:r>
           </a:p>
-        </p:txBody>
-      </p:sp>
-      <p:sp>
-        <p:nvSpPr>
-          <p:cNvPr id="12" name="Rectangle 11"/>
+          <a:p>
+            <a:pPr algn="l"/>
+            <a:r>
+              <a:rPr sz="700" b="0">
+                <a:solidFill>
+                  <a:srgbClr val="8AA8C0"/>
+                </a:solidFill>
+                <a:latin typeface="Meiryo UI"/>
+              </a:rPr>
+              <a:t>rss.itmedia.co.jp/rss/2.0/…</a:t>
+            </a:r>
+          </a:p>
+        </p:txBody>
+      </p:sp>
+      <p:sp>
+        <p:nvSpPr>
+          <p:cNvPr id="14" name="Rectangle 13"/>
           <p:cNvSpPr/>
           <p:nvPr/>
         </p:nvSpPr>
         <p:spPr>
           <a:xfrm>
-            <a:off x="320040" y="3977639"/>
-            <a:ext cx="2651760" cy="594360"/>
+            <a:off x="201168" y="3291840"/>
+            <a:ext cx="2423160" cy="594360"/>
           </a:xfrm>
           <a:prstGeom prst="roundRect">
             <a:avLst>
-              <a:gd name="adj" fmla="val 20000"/>
+              <a:gd name="adj" fmla="val 10000"/>
             </a:avLst>
           </a:prstGeom>
           <a:solidFill>
-            <a:srgbClr val="2E6EC8"/>
+            <a:srgbClr val="0A3560"/>
           </a:solidFill>
-          <a:ln>
-            <a:noFill/>
+          <a:ln w="10160">
+            <a:solidFill>
+              <a:srgbClr val="298FFF"/>
+            </a:solidFill>
           </a:ln>
         </p:spPr>
         <p:style>
@@ -3587,39 +3704,89 @@
           <a:bodyPr rtlCol="0" anchor="ctr" wrap="square"/>
           <a:lstStyle/>
           <a:p>
+            <a:pPr algn="l"/>
+            <a:r>
+              <a:rPr sz="900" b="1">
+                <a:solidFill>
+                  <a:srgbClr val="298FFF"/>
+                </a:solidFill>
+                <a:latin typeface="Meiryo UI"/>
+              </a:rPr>
+              <a:t>TechCrunch JP</a:t>
+            </a:r>
+          </a:p>
+          <a:p>
+            <a:pPr algn="l"/>
+            <a:r>
+              <a:rPr sz="700" b="0">
+                <a:solidFill>
+                  <a:srgbClr val="8AA8C0"/>
+                </a:solidFill>
+                <a:latin typeface="Meiryo UI"/>
+              </a:rPr>
+              <a:t>jp.techcrunch.com/feed/</a:t>
+            </a:r>
+          </a:p>
+        </p:txBody>
+      </p:sp>
+      <p:sp>
+        <p:nvSpPr>
+          <p:cNvPr id="15" name="TextBox 14"/>
+          <p:cNvSpPr txBox="1"/>
+          <p:nvPr/>
+        </p:nvSpPr>
+        <p:spPr>
+          <a:xfrm>
+            <a:off x="201168" y="4023360"/>
+            <a:ext cx="2423160" cy="256032"/>
+          </a:xfrm>
+          <a:prstGeom prst="rect">
+            <a:avLst/>
+          </a:prstGeom>
+          <a:noFill/>
+        </p:spPr>
+        <p:txBody>
+          <a:bodyPr wrap="none">
+            <a:spAutoFit/>
+          </a:bodyPr>
+          <a:lstStyle/>
+          <a:p>
             <a:pPr algn="ctr"/>
             <a:r>
-              <a:rPr sz="950" b="0">
-                <a:solidFill>
-                  <a:srgbClr val="FFFFFF"/>
-                </a:solidFill>
-              </a:rPr>
-              <a:t>TechCrunch Japan</a:t>
-            </a:r>
-          </a:p>
-        </p:txBody>
-      </p:sp>
-      <p:sp>
-        <p:nvSpPr>
-          <p:cNvPr id="13" name="Rectangle 12"/>
+              <a:rPr sz="700">
+                <a:solidFill>
+                  <a:srgbClr val="F8D266"/>
+                </a:solidFill>
+                <a:latin typeface="Consolas"/>
+              </a:rPr>
+              <a:t>lib: feedparser 6.x  (RSS/Atom parser)</a:t>
+            </a:r>
+          </a:p>
+        </p:txBody>
+      </p:sp>
+      <p:sp>
+        <p:nvSpPr>
+          <p:cNvPr id="16" name="Rectangle 15"/>
           <p:cNvSpPr/>
           <p:nvPr/>
         </p:nvSpPr>
         <p:spPr>
           <a:xfrm>
-            <a:off x="3474720" y="1234440"/>
-            <a:ext cx="3200400" cy="658368"/>
+            <a:off x="201168" y="4315968"/>
+            <a:ext cx="2423160" cy="1737360"/>
           </a:xfrm>
           <a:prstGeom prst="roundRect">
             <a:avLst>
-              <a:gd name="adj" fmla="val 15000"/>
+              <a:gd name="adj" fmla="val 8000"/>
             </a:avLst>
           </a:prstGeom>
           <a:solidFill>
-            <a:srgbClr val="43A047"/>
+            <a:srgbClr val="0A2840"/>
           </a:solidFill>
-          <a:ln>
-            <a:noFill/>
+          <a:ln w="6350">
+            <a:solidFill>
+              <a:srgbClr val="648CAA"/>
+            </a:solidFill>
           </a:ln>
         </p:spPr>
         <p:style>
@@ -3640,40 +3807,102 @@
           <a:bodyPr rtlCol="0" anchor="ctr" wrap="square"/>
           <a:lstStyle/>
           <a:p>
-            <a:pPr algn="ctr"/>
-            <a:r>
-              <a:rPr sz="950" b="0">
-                <a:solidFill>
-                  <a:srgbClr val="FFFFFF"/>
-                </a:solidFill>
-              </a:rPr>
-              <a:t>① RSS収集
-fetch_articles_from_feed()</a:t>
-            </a:r>
-          </a:p>
-        </p:txBody>
-      </p:sp>
-      <p:sp>
-        <p:nvSpPr>
-          <p:cNvPr id="14" name="Rectangle 13"/>
+            <a:pPr algn="l"/>
+            <a:r>
+              <a:rPr sz="750" b="1">
+                <a:solidFill>
+                  <a:srgbClr val="8AA8C0"/>
+                </a:solidFill>
+                <a:latin typeface="Meiryo UI"/>
+              </a:rPr>
+              <a:t>Keyword Filter  (17 words)</a:t>
+            </a:r>
+          </a:p>
+          <a:p>
+            <a:pPr algn="l"/>
+            <a:r>
+              <a:rPr sz="700" b="0">
+                <a:solidFill>
+                  <a:srgbClr val="F8D266"/>
+                </a:solidFill>
+                <a:latin typeface="Consolas"/>
+              </a:rPr>
+              <a:t>GPT / 生成AI / LLM / 大規模言語モデル</a:t>
+            </a:r>
+          </a:p>
+          <a:p>
+            <a:pPr algn="l"/>
+            <a:r>
+              <a:rPr sz="700" b="0">
+                <a:solidFill>
+                  <a:srgbClr val="F8D266"/>
+                </a:solidFill>
+                <a:latin typeface="Consolas"/>
+              </a:rPr>
+              <a:t>OpenAI / ChatGPT / Anthropic / Claude</a:t>
+            </a:r>
+          </a:p>
+          <a:p>
+            <a:pPr algn="l"/>
+            <a:r>
+              <a:rPr sz="700" b="0">
+                <a:solidFill>
+                  <a:srgbClr val="F8D266"/>
+                </a:solidFill>
+                <a:latin typeface="Consolas"/>
+              </a:rPr>
+              <a:t>Gemini / Grok / DeepSeek / Copilot</a:t>
+            </a:r>
+          </a:p>
+          <a:p>
+            <a:pPr algn="l"/>
+            <a:r>
+              <a:rPr sz="700" b="0">
+                <a:solidFill>
+                  <a:srgbClr val="F8D266"/>
+                </a:solidFill>
+                <a:latin typeface="Consolas"/>
+              </a:rPr>
+              <a:t>IBM BoB / AIエージェント / AI Agent</a:t>
+            </a:r>
+          </a:p>
+          <a:p>
+            <a:pPr algn="l"/>
+            <a:r>
+              <a:rPr sz="700" b="0">
+                <a:solidFill>
+                  <a:srgbClr val="F8D266"/>
+                </a:solidFill>
+                <a:latin typeface="Consolas"/>
+              </a:rPr>
+              <a:t>Agentic AI / RAG</a:t>
+            </a:r>
+          </a:p>
+        </p:txBody>
+      </p:sp>
+      <p:sp>
+        <p:nvSpPr>
+          <p:cNvPr id="17" name="Rectangle 16"/>
           <p:cNvSpPr/>
           <p:nvPr/>
         </p:nvSpPr>
         <p:spPr>
           <a:xfrm>
-            <a:off x="3474720" y="2148840"/>
-            <a:ext cx="3200400" cy="658368"/>
+            <a:off x="3017520" y="960120"/>
+            <a:ext cx="3749039" cy="868680"/>
           </a:xfrm>
           <a:prstGeom prst="roundRect">
             <a:avLst>
-              <a:gd name="adj" fmla="val 15000"/>
+              <a:gd name="adj" fmla="val 10000"/>
             </a:avLst>
           </a:prstGeom>
           <a:solidFill>
-            <a:srgbClr val="2E7D32"/>
+            <a:srgbClr val="073020"/>
           </a:solidFill>
-          <a:ln>
-            <a:noFill/>
+          <a:ln w="10160">
+            <a:solidFill>
+              <a:srgbClr val="00C87A"/>
+            </a:solidFill>
           </a:ln>
         </p:spPr>
         <p:style>
@@ -3694,40 +3923,78 @@
           <a:bodyPr rtlCol="0" anchor="ctr" wrap="square"/>
           <a:lstStyle/>
           <a:p>
-            <a:pPr algn="ctr"/>
-            <a:r>
-              <a:rPr sz="950" b="0">
-                <a:solidFill>
-                  <a:srgbClr val="FFFFFF"/>
-                </a:solidFill>
-              </a:rPr>
-              <a:t>② キーワードフィルタ
-filter_articles()</a:t>
-            </a:r>
-          </a:p>
-        </p:txBody>
-      </p:sp>
-      <p:sp>
-        <p:nvSpPr>
-          <p:cNvPr id="15" name="Rectangle 14"/>
+            <a:pPr algn="l"/>
+            <a:r>
+              <a:rPr sz="900" b="1">
+                <a:solidFill>
+                  <a:srgbClr val="00C87A"/>
+                </a:solidFill>
+                <a:latin typeface="Meiryo UI"/>
+              </a:rPr>
+              <a:t>① collect_all_articles()</a:t>
+            </a:r>
+          </a:p>
+          <a:p>
+            <a:pPr algn="l"/>
+            <a:r>
+              <a:rPr sz="750" b="0">
+                <a:solidFill>
+                  <a:srgbClr val="8AA8C0"/>
+                </a:solidFill>
+                <a:latin typeface="Meiryo UI"/>
+              </a:rPr>
+              <a:t>RSS fetch  →  feedparser.parse(url)</a:t>
+            </a:r>
+          </a:p>
+          <a:p>
+            <a:pPr algn="l"/>
+            <a:r>
+              <a:rPr sz="750" b="0">
+                <a:solidFill>
+                  <a:srgbClr val="8AA8C0"/>
+                </a:solidFill>
+                <a:latin typeface="Meiryo UI"/>
+              </a:rPr>
+              <a:t>期間: 前日 00:00〜24:00 JST</a:t>
+            </a:r>
+          </a:p>
+          <a:p>
+            <a:pPr algn="l"/>
+            <a:r>
+              <a:rPr sz="750" b="0">
+                <a:solidFill>
+                  <a:srgbClr val="8AA8C0"/>
+                </a:solidFill>
+                <a:latin typeface="Meiryo UI"/>
+              </a:rPr>
+              <a:t>戻り値: list[dict]  {title, url, summary}</a:t>
+            </a:r>
+          </a:p>
+        </p:txBody>
+      </p:sp>
+      <p:sp>
+        <p:nvSpPr>
+          <p:cNvPr id="18" name="Rectangle 17"/>
           <p:cNvSpPr/>
           <p:nvPr/>
         </p:nvSpPr>
         <p:spPr>
           <a:xfrm>
-            <a:off x="3474720" y="3063240"/>
-            <a:ext cx="3200400" cy="658368"/>
+            <a:off x="3017520" y="2011680"/>
+            <a:ext cx="3749039" cy="868680"/>
           </a:xfrm>
           <a:prstGeom prst="roundRect">
             <a:avLst>
-              <a:gd name="adj" fmla="val 15000"/>
+              <a:gd name="adj" fmla="val 10000"/>
             </a:avLst>
           </a:prstGeom>
           <a:solidFill>
-            <a:srgbClr val="1B5E20"/>
+            <a:srgbClr val="073020"/>
           </a:solidFill>
-          <a:ln>
-            <a:noFill/>
+          <a:ln w="10160">
+            <a:solidFill>
+              <a:srgbClr val="00C87A"/>
+            </a:solidFill>
           </a:ln>
         </p:spPr>
         <p:style>
@@ -3748,40 +4015,78 @@
           <a:bodyPr rtlCol="0" anchor="ctr" wrap="square"/>
           <a:lstStyle/>
           <a:p>
-            <a:pPr algn="ctr"/>
-            <a:r>
-              <a:rPr sz="950" b="0">
-                <a:solidFill>
-                  <a:srgbClr val="FFFFFF"/>
-                </a:solidFill>
-              </a:rPr>
-              <a:t>③ Claude API 要約
-summarize_with_claude()</a:t>
-            </a:r>
-          </a:p>
-        </p:txBody>
-      </p:sp>
-      <p:sp>
-        <p:nvSpPr>
-          <p:cNvPr id="16" name="Rectangle 15"/>
+            <a:pPr algn="l"/>
+            <a:r>
+              <a:rPr sz="900" b="1">
+                <a:solidFill>
+                  <a:srgbClr val="00C87A"/>
+                </a:solidFill>
+                <a:latin typeface="Meiryo UI"/>
+              </a:rPr>
+              <a:t>② filter_articles()</a:t>
+            </a:r>
+          </a:p>
+          <a:p>
+            <a:pPr algn="l"/>
+            <a:r>
+              <a:rPr sz="750" b="0">
+                <a:solidFill>
+                  <a:srgbClr val="8AA8C0"/>
+                </a:solidFill>
+                <a:latin typeface="Meiryo UI"/>
+              </a:rPr>
+              <a:t>is_ai_related() でキーワード照合</a:t>
+            </a:r>
+          </a:p>
+          <a:p>
+            <a:pPr algn="l"/>
+            <a:r>
+              <a:rPr sz="750" b="0">
+                <a:solidFill>
+                  <a:srgbClr val="8AA8C0"/>
+                </a:solidFill>
+                <a:latin typeface="Meiryo UI"/>
+              </a:rPr>
+              <a:t>title + summary を lower() 比較</a:t>
+            </a:r>
+          </a:p>
+          <a:p>
+            <a:pPr algn="l"/>
+            <a:r>
+              <a:rPr sz="750" b="0">
+                <a:solidFill>
+                  <a:srgbClr val="8AA8C0"/>
+                </a:solidFill>
+                <a:latin typeface="Meiryo UI"/>
+              </a:rPr>
+              <a:t>戻り値: list[dict]  (絞り込み済み)</a:t>
+            </a:r>
+          </a:p>
+        </p:txBody>
+      </p:sp>
+      <p:sp>
+        <p:nvSpPr>
+          <p:cNvPr id="19" name="Rectangle 18"/>
           <p:cNvSpPr/>
           <p:nvPr/>
         </p:nvSpPr>
         <p:spPr>
           <a:xfrm>
-            <a:off x="3474720" y="4160520"/>
-            <a:ext cx="3200400" cy="658368"/>
+            <a:off x="3017520" y="3063240"/>
+            <a:ext cx="3749039" cy="914400"/>
           </a:xfrm>
           <a:prstGeom prst="roundRect">
             <a:avLst>
-              <a:gd name="adj" fmla="val 15000"/>
+              <a:gd name="adj" fmla="val 10000"/>
             </a:avLst>
           </a:prstGeom>
           <a:solidFill>
-            <a:srgbClr val="33691E"/>
+            <a:srgbClr val="073020"/>
           </a:solidFill>
-          <a:ln>
-            <a:noFill/>
+          <a:ln w="10160">
+            <a:solidFill>
+              <a:srgbClr val="00C87A"/>
+            </a:solidFill>
           </a:ln>
         </p:spPr>
         <p:style>
@@ -3802,39 +4107,179 @@
           <a:bodyPr rtlCol="0" anchor="ctr" wrap="square"/>
           <a:lstStyle/>
           <a:p>
-            <a:pPr algn="ctr"/>
-            <a:r>
-              <a:rPr sz="950" b="0">
-                <a:solidFill>
-                  <a:srgbClr val="FFFFFF"/>
-                </a:solidFill>
-              </a:rPr>
-              <a:t>④ メール送信
-send_email()</a:t>
+            <a:pPr algn="l"/>
+            <a:r>
+              <a:rPr sz="900" b="1">
+                <a:solidFill>
+                  <a:srgbClr val="00C87A"/>
+                </a:solidFill>
+                <a:latin typeface="Meiryo UI"/>
+              </a:rPr>
+              <a:t>③ summarize_with_claude()</a:t>
+            </a:r>
+          </a:p>
+          <a:p>
+            <a:pPr algn="l"/>
+            <a:r>
+              <a:rPr sz="750" b="0">
+                <a:solidFill>
+                  <a:srgbClr val="8AA8C0"/>
+                </a:solidFill>
+                <a:latin typeface="Meiryo UI"/>
+              </a:rPr>
+              <a:t>client.messages.create()</a:t>
+            </a:r>
+          </a:p>
+          <a:p>
+            <a:pPr algn="l"/>
+            <a:r>
+              <a:rPr sz="750" b="0">
+                <a:solidFill>
+                  <a:srgbClr val="8AA8C0"/>
+                </a:solidFill>
+                <a:latin typeface="Meiryo UI"/>
+              </a:rPr>
+              <a:t>model: claude-sonnet-4-6</a:t>
+            </a:r>
+          </a:p>
+          <a:p>
+            <a:pPr algn="l"/>
+            <a:r>
+              <a:rPr sz="750" b="0">
+                <a:solidFill>
+                  <a:srgbClr val="8AA8C0"/>
+                </a:solidFill>
+                <a:latin typeface="Meiryo UI"/>
+              </a:rPr>
+              <a:t>max_tokens: 4096</a:t>
+            </a:r>
+          </a:p>
+          <a:p>
+            <a:pPr algn="l"/>
+            <a:r>
+              <a:rPr sz="750" b="0">
+                <a:solidFill>
+                  <a:srgbClr val="8AA8C0"/>
+                </a:solidFill>
+                <a:latin typeface="Meiryo UI"/>
+              </a:rPr>
+              <a:t>→ 重複排除 / 重要度ソート / 3行要約</a:t>
+            </a:r>
+          </a:p>
+        </p:txBody>
+      </p:sp>
+      <p:sp>
+        <p:nvSpPr>
+          <p:cNvPr id="20" name="Rectangle 19"/>
+          <p:cNvSpPr/>
+          <p:nvPr/>
+        </p:nvSpPr>
+        <p:spPr>
+          <a:xfrm>
+            <a:off x="3017520" y="4251960"/>
+            <a:ext cx="3749039" cy="868680"/>
+          </a:xfrm>
+          <a:prstGeom prst="roundRect">
+            <a:avLst>
+              <a:gd name="adj" fmla="val 10000"/>
+            </a:avLst>
+          </a:prstGeom>
+          <a:solidFill>
+            <a:srgbClr val="073020"/>
+          </a:solidFill>
+          <a:ln w="10160">
+            <a:solidFill>
+              <a:srgbClr val="00C87A"/>
+            </a:solidFill>
+          </a:ln>
+        </p:spPr>
+        <p:style>
+          <a:lnRef idx="1">
+            <a:schemeClr val="accent1"/>
+          </a:lnRef>
+          <a:fillRef idx="3">
+            <a:schemeClr val="accent1"/>
+          </a:fillRef>
+          <a:effectRef idx="2">
+            <a:schemeClr val="accent1"/>
+          </a:effectRef>
+          <a:fontRef idx="minor">
+            <a:schemeClr val="lt1"/>
+          </a:fontRef>
+        </p:style>
+        <p:txBody>
+          <a:bodyPr rtlCol="0" anchor="ctr" wrap="square"/>
+          <a:lstStyle/>
+          <a:p>
+            <a:pPr algn="l"/>
+            <a:r>
+              <a:rPr sz="900" b="1">
+                <a:solidFill>
+                  <a:srgbClr val="00C87A"/>
+                </a:solidFill>
+                <a:latin typeface="Meiryo UI"/>
+              </a:rPr>
+              <a:t>④ send_email()</a:t>
+            </a:r>
+          </a:p>
+          <a:p>
+            <a:pPr algn="l"/>
+            <a:r>
+              <a:rPr sz="750" b="0">
+                <a:solidFill>
+                  <a:srgbClr val="8AA8C0"/>
+                </a:solidFill>
+                <a:latin typeface="Meiryo UI"/>
+              </a:rPr>
+              <a:t>smtplib.SMTP_SSL('smtp.gmail.com', 465)</a:t>
+            </a:r>
+          </a:p>
+          <a:p>
+            <a:pPr algn="l"/>
+            <a:r>
+              <a:rPr sz="750" b="0">
+                <a:solidFill>
+                  <a:srgbClr val="8AA8C0"/>
+                </a:solidFill>
+                <a:latin typeface="Meiryo UI"/>
+              </a:rPr>
+              <a:t>MIMEMultipart('alternative')</a:t>
+            </a:r>
+          </a:p>
+          <a:p>
+            <a:pPr algn="l"/>
+            <a:r>
+              <a:rPr sz="750" b="0">
+                <a:solidFill>
+                  <a:srgbClr val="8AA8C0"/>
+                </a:solidFill>
+                <a:latin typeface="Meiryo UI"/>
+              </a:rPr>
+              <a:t>text/plain + text/html (UTF-8)</a:t>
             </a:r>
           </a:p>
         </p:txBody>
       </p:sp>
       <p:cxnSp>
         <p:nvCxnSpPr>
-          <p:cNvPr id="17" name="Connector 16"/>
+          <p:cNvPr id="21" name="Connector 20"/>
           <p:cNvCxnSpPr/>
           <p:nvPr/>
         </p:nvCxnSpPr>
         <p:spPr>
           <a:xfrm>
-            <a:off x="5074920" y="1892807"/>
-            <a:ext cx="0" cy="256032"/>
+            <a:off x="4892040" y="1828800"/>
+            <a:ext cx="0" cy="182880"/>
           </a:xfrm>
           <a:prstGeom prst="line">
             <a:avLst/>
           </a:prstGeom>
-          <a:ln w="25400">
+          <a:ln w="19050">
             <a:solidFill>
-              <a:srgbClr val="2E7D32"/>
+              <a:srgbClr val="00C87A"/>
             </a:solidFill>
+            <a:headEnd type="arrow" w="med" len="med"/>
             <a:tailEnd type="none"/>
-            <a:headEnd type="arrow" w="med" len="med"/>
           </a:ln>
         </p:spPr>
         <p:style>
@@ -3854,24 +4299,24 @@
       </p:cxnSp>
       <p:cxnSp>
         <p:nvCxnSpPr>
-          <p:cNvPr id="18" name="Connector 17"/>
+          <p:cNvPr id="22" name="Connector 21"/>
           <p:cNvCxnSpPr/>
           <p:nvPr/>
         </p:nvCxnSpPr>
         <p:spPr>
           <a:xfrm>
-            <a:off x="5074920" y="2807208"/>
-            <a:ext cx="0" cy="256031"/>
+            <a:off x="4892040" y="2880360"/>
+            <a:ext cx="0" cy="182880"/>
           </a:xfrm>
           <a:prstGeom prst="line">
             <a:avLst/>
           </a:prstGeom>
-          <a:ln w="25400">
+          <a:ln w="19050">
             <a:solidFill>
-              <a:srgbClr val="2E7D32"/>
+              <a:srgbClr val="00C87A"/>
             </a:solidFill>
+            <a:headEnd type="arrow" w="med" len="med"/>
             <a:tailEnd type="none"/>
-            <a:headEnd type="arrow" w="med" len="med"/>
           </a:ln>
         </p:spPr>
         <p:style>
@@ -3891,24 +4336,24 @@
       </p:cxnSp>
       <p:cxnSp>
         <p:nvCxnSpPr>
-          <p:cNvPr id="19" name="Connector 18"/>
+          <p:cNvPr id="23" name="Connector 22"/>
           <p:cNvCxnSpPr/>
           <p:nvPr/>
         </p:nvCxnSpPr>
         <p:spPr>
           <a:xfrm>
-            <a:off x="5074920" y="3721608"/>
-            <a:ext cx="0" cy="256032"/>
+            <a:off x="4892040" y="3931920"/>
+            <a:ext cx="0" cy="182880"/>
           </a:xfrm>
           <a:prstGeom prst="line">
             <a:avLst/>
           </a:prstGeom>
-          <a:ln w="25400">
+          <a:ln w="19050">
             <a:solidFill>
-              <a:srgbClr val="2E7D32"/>
+              <a:srgbClr val="00C87A"/>
             </a:solidFill>
+            <a:headEnd type="arrow" w="med" len="med"/>
             <a:tailEnd type="none"/>
-            <a:headEnd type="arrow" w="med" len="med"/>
           </a:ln>
         </p:spPr>
         <p:style>
@@ -3928,103 +4373,14 @@
       </p:cxnSp>
       <p:sp>
         <p:nvSpPr>
-          <p:cNvPr id="20" name="Rectangle 19"/>
+          <p:cNvPr id="24" name="Rectangle 23"/>
           <p:cNvSpPr/>
           <p:nvPr/>
         </p:nvSpPr>
         <p:spPr>
           <a:xfrm>
-            <a:off x="9006840" y="1234440"/>
-            <a:ext cx="2834640" cy="1005840"/>
-          </a:xfrm>
-          <a:prstGeom prst="roundRect">
-            <a:avLst>
-              <a:gd name="adj" fmla="val 20000"/>
-            </a:avLst>
-          </a:prstGeom>
-          <a:solidFill>
-            <a:srgbClr val="F57C00"/>
-          </a:solidFill>
-          <a:ln>
-            <a:noFill/>
-          </a:ln>
-        </p:spPr>
-        <p:style>
-          <a:lnRef idx="1">
-            <a:schemeClr val="accent1"/>
-          </a:lnRef>
-          <a:fillRef idx="3">
-            <a:schemeClr val="accent1"/>
-          </a:fillRef>
-          <a:effectRef idx="2">
-            <a:schemeClr val="accent1"/>
-          </a:effectRef>
-          <a:fontRef idx="minor">
-            <a:schemeClr val="lt1"/>
-          </a:fontRef>
-        </p:style>
-        <p:txBody>
-          <a:bodyPr rtlCol="0" anchor="ctr" wrap="square"/>
-          <a:lstStyle/>
-          <a:p>
-            <a:pPr algn="ctr"/>
-            <a:r>
-              <a:rPr sz="1300" b="1">
-                <a:solidFill>
-                  <a:srgbClr val="FFFFFF"/>
-                </a:solidFill>
-              </a:rPr>
-              <a:t>Gmail
-受信トレイ</a:t>
-            </a:r>
-          </a:p>
-        </p:txBody>
-      </p:sp>
-      <p:sp>
-        <p:nvSpPr>
-          <p:cNvPr id="21" name="TextBox 20"/>
-          <p:cNvSpPr txBox="1"/>
-          <p:nvPr/>
-        </p:nvSpPr>
-        <p:spPr>
-          <a:xfrm>
-            <a:off x="9006840" y="2286000"/>
-            <a:ext cx="2834640" cy="502920"/>
-          </a:xfrm>
-          <a:prstGeom prst="rect">
-            <a:avLst/>
-          </a:prstGeom>
-          <a:noFill/>
-        </p:spPr>
-        <p:txBody>
-          <a:bodyPr wrap="square">
-            <a:spAutoFit/>
-          </a:bodyPr>
-          <a:lstStyle/>
-          <a:p>
-            <a:pPr algn="ctr"/>
-            <a:r>
-              <a:rPr sz="850" b="0">
-                <a:solidFill>
-                  <a:srgbClr val="6D4C41"/>
-                </a:solidFill>
-              </a:rPr>
-              <a:t>件名：【生成AI日報】
-YYYY年MM月DD日</a:t>
-            </a:r>
-          </a:p>
-        </p:txBody>
-      </p:sp>
-      <p:sp>
-        <p:nvSpPr>
-          <p:cNvPr id="22" name="Rectangle 21"/>
-          <p:cNvSpPr/>
-          <p:nvPr/>
-        </p:nvSpPr>
-        <p:spPr>
-          <a:xfrm>
-            <a:off x="9006840" y="2880360"/>
-            <a:ext cx="2834640" cy="1371600"/>
+            <a:off x="8979408" y="960120"/>
+            <a:ext cx="3017520" cy="822960"/>
           </a:xfrm>
           <a:prstGeom prst="roundRect">
             <a:avLst>
@@ -4032,10 +4388,12 @@
             </a:avLst>
           </a:prstGeom>
           <a:solidFill>
-            <a:srgbClr val="FFE0B2"/>
+            <a:srgbClr val="402000"/>
           </a:solidFill>
-          <a:ln>
-            <a:noFill/>
+          <a:ln w="15240">
+            <a:solidFill>
+              <a:srgbClr val="FF7A00"/>
+            </a:solidFill>
           </a:ln>
         </p:spPr>
         <p:style>
@@ -4058,39 +4416,64 @@
           <a:p>
             <a:pPr algn="l"/>
             <a:r>
-              <a:rPr sz="900" b="0">
-                <a:solidFill>
-                  <a:srgbClr val="4E3423"/>
-                </a:solidFill>
-              </a:rPr>
-              <a:t>• SMTP SSL（Port 465）
-• プレーンテキスト＋HTML
-• 毎朝 JST 07:00 に自動送信</a:t>
-            </a:r>
-          </a:p>
-        </p:txBody>
-      </p:sp>
-      <p:sp>
-        <p:nvSpPr>
-          <p:cNvPr id="23" name="Rectangle 22"/>
+              <a:rPr sz="1100" b="1">
+                <a:solidFill>
+                  <a:srgbClr val="FF7A00"/>
+                </a:solidFill>
+                <a:latin typeface="Meiryo UI"/>
+              </a:rPr>
+              <a:t>Gmail  SMTP</a:t>
+            </a:r>
+          </a:p>
+          <a:p>
+            <a:pPr algn="l"/>
+            <a:r>
+              <a:rPr sz="800" b="0">
+                <a:solidFill>
+                  <a:srgbClr val="8AA8C0"/>
+                </a:solidFill>
+                <a:latin typeface="Meiryo UI"/>
+              </a:rPr>
+              <a:t>smtp.gmail.com  :  465  (SSL)</a:t>
+            </a:r>
+          </a:p>
+          <a:p>
+            <a:pPr algn="l"/>
+            <a:r>
+              <a:rPr sz="800" b="0">
+                <a:solidFill>
+                  <a:srgbClr val="8AA8C0"/>
+                </a:solidFill>
+                <a:latin typeface="Meiryo UI"/>
+              </a:rPr>
+              <a:t>Auth: App Password (16-digit)</a:t>
+            </a:r>
+          </a:p>
+        </p:txBody>
+      </p:sp>
+      <p:sp>
+        <p:nvSpPr>
+          <p:cNvPr id="25" name="Rectangle 24"/>
           <p:cNvSpPr/>
           <p:nvPr/>
         </p:nvSpPr>
         <p:spPr>
           <a:xfrm>
-            <a:off x="3474720" y="5257800"/>
-            <a:ext cx="3200400" cy="685800"/>
+            <a:off x="8979408" y="1920240"/>
+            <a:ext cx="3017520" cy="1417320"/>
           </a:xfrm>
           <a:prstGeom prst="roundRect">
             <a:avLst>
-              <a:gd name="adj" fmla="val 15000"/>
+              <a:gd name="adj" fmla="val 8000"/>
             </a:avLst>
           </a:prstGeom>
           <a:solidFill>
-            <a:srgbClr val="6A1B9A"/>
+            <a:srgbClr val="281600"/>
           </a:solidFill>
-          <a:ln>
-            <a:noFill/>
+          <a:ln w="6350">
+            <a:solidFill>
+              <a:srgbClr val="2A4565"/>
+            </a:solidFill>
           </a:ln>
         </p:spPr>
         <p:style>
@@ -4111,40 +4494,90 @@
           <a:bodyPr rtlCol="0" anchor="ctr" wrap="square"/>
           <a:lstStyle/>
           <a:p>
-            <a:pPr algn="ctr"/>
-            <a:r>
-              <a:rPr sz="950" b="0">
-                <a:solidFill>
-                  <a:srgbClr val="FFFFFF"/>
-                </a:solidFill>
-              </a:rPr>
-              <a:t>⏰  GitHub Actions
-cron: '0 22 * * *' (JST 07:00)</a:t>
-            </a:r>
-          </a:p>
-        </p:txBody>
-      </p:sp>
-      <p:sp>
-        <p:nvSpPr>
-          <p:cNvPr id="24" name="Rectangle 23"/>
+            <a:pPr algn="l"/>
+            <a:r>
+              <a:rPr sz="800" b="1">
+                <a:solidFill>
+                  <a:srgbClr val="8AA8C0"/>
+                </a:solidFill>
+                <a:latin typeface="Meiryo UI"/>
+              </a:rPr>
+              <a:t>Mail Spec</a:t>
+            </a:r>
+          </a:p>
+          <a:p>
+            <a:pPr algn="l"/>
+            <a:r>
+              <a:rPr sz="750" b="0">
+                <a:solidFill>
+                  <a:srgbClr val="F8D266"/>
+                </a:solidFill>
+                <a:latin typeface="Consolas"/>
+              </a:rPr>
+              <a:t>Subject : 【生成AI日報】YYYY年MM月DD日</a:t>
+            </a:r>
+          </a:p>
+          <a:p>
+            <a:pPr algn="l"/>
+            <a:r>
+              <a:rPr sz="750" b="0">
+                <a:solidFill>
+                  <a:srgbClr val="F8D266"/>
+                </a:solidFill>
+                <a:latin typeface="Consolas"/>
+              </a:rPr>
+              <a:t>Body    : text/plain + text/html</a:t>
+            </a:r>
+          </a:p>
+          <a:p>
+            <a:pPr algn="l"/>
+            <a:r>
+              <a:rPr sz="750" b="0">
+                <a:solidFill>
+                  <a:srgbClr val="F8D266"/>
+                </a:solidFill>
+                <a:latin typeface="Consolas"/>
+              </a:rPr>
+              <a:t>Charset : UTF-8</a:t>
+            </a:r>
+          </a:p>
+          <a:p>
+            <a:pPr algn="l"/>
+            <a:r>
+              <a:rPr sz="750" b="0">
+                <a:solidFill>
+                  <a:srgbClr val="F8D266"/>
+                </a:solidFill>
+                <a:latin typeface="Consolas"/>
+              </a:rPr>
+              <a:t>Trigger : cron JST 07:00 daily</a:t>
+            </a:r>
+          </a:p>
+        </p:txBody>
+      </p:sp>
+      <p:sp>
+        <p:nvSpPr>
+          <p:cNvPr id="26" name="Rectangle 25"/>
           <p:cNvSpPr/>
           <p:nvPr/>
         </p:nvSpPr>
         <p:spPr>
           <a:xfrm>
-            <a:off x="320040" y="5257800"/>
-            <a:ext cx="2651760" cy="685800"/>
+            <a:off x="8979408" y="3493008"/>
+            <a:ext cx="3017520" cy="1417320"/>
           </a:xfrm>
           <a:prstGeom prst="roundRect">
             <a:avLst>
-              <a:gd name="adj" fmla="val 15000"/>
+              <a:gd name="adj" fmla="val 8000"/>
             </a:avLst>
           </a:prstGeom>
           <a:solidFill>
-            <a:srgbClr val="7890A8"/>
+            <a:srgbClr val="122030"/>
           </a:solidFill>
-          <a:ln>
-            <a:noFill/>
+          <a:ln w="10160">
+            <a:solidFill>
+              <a:srgbClr val="648CAA"/>
+            </a:solidFill>
           </a:ln>
         </p:spPr>
         <p:style>
@@ -4165,41 +4598,90 @@
           <a:bodyPr rtlCol="0" anchor="ctr" wrap="square"/>
           <a:lstStyle/>
           <a:p>
-            <a:pPr algn="ctr"/>
-            <a:r>
-              <a:rPr sz="850" b="0">
-                <a:solidFill>
-                  <a:srgbClr val="FFFFFF"/>
-                </a:solidFill>
-              </a:rPr>
-              <a:t>🔐  GitHub Secrets
-ANTHROPIC_API_KEY
-GMAIL_APP_PASSWORD 等</a:t>
-            </a:r>
-          </a:p>
-        </p:txBody>
-      </p:sp>
-      <p:sp>
-        <p:nvSpPr>
-          <p:cNvPr id="25" name="Rectangle 24"/>
+            <a:pPr algn="l"/>
+            <a:r>
+              <a:rPr sz="800" b="1">
+                <a:solidFill>
+                  <a:srgbClr val="648CAA"/>
+                </a:solidFill>
+                <a:latin typeface="Meiryo UI"/>
+              </a:rPr>
+              <a:t>GitHub Secrets  (env injection)</a:t>
+            </a:r>
+          </a:p>
+          <a:p>
+            <a:pPr algn="l"/>
+            <a:r>
+              <a:rPr sz="750" b="0">
+                <a:solidFill>
+                  <a:srgbClr val="F8D266"/>
+                </a:solidFill>
+                <a:latin typeface="Consolas"/>
+              </a:rPr>
+              <a:t>ANTHROPIC_API_KEY</a:t>
+            </a:r>
+          </a:p>
+          <a:p>
+            <a:pPr algn="l"/>
+            <a:r>
+              <a:rPr sz="750" b="0">
+                <a:solidFill>
+                  <a:srgbClr val="F8D266"/>
+                </a:solidFill>
+                <a:latin typeface="Consolas"/>
+              </a:rPr>
+              <a:t>GMAIL_ADDRESS</a:t>
+            </a:r>
+          </a:p>
+          <a:p>
+            <a:pPr algn="l"/>
+            <a:r>
+              <a:rPr sz="750" b="0">
+                <a:solidFill>
+                  <a:srgbClr val="F8D266"/>
+                </a:solidFill>
+                <a:latin typeface="Consolas"/>
+              </a:rPr>
+              <a:t>GMAIL_APP_PASSWORD</a:t>
+            </a:r>
+          </a:p>
+          <a:p>
+            <a:pPr algn="l"/>
+            <a:r>
+              <a:rPr sz="750" b="0">
+                <a:solidFill>
+                  <a:srgbClr val="F8D266"/>
+                </a:solidFill>
+                <a:latin typeface="Consolas"/>
+              </a:rPr>
+              <a:t>TO_EMAIL</a:t>
+            </a:r>
+          </a:p>
+        </p:txBody>
+      </p:sp>
+      <p:sp>
+        <p:nvSpPr>
+          <p:cNvPr id="27" name="Rectangle 26"/>
           <p:cNvSpPr/>
           <p:nvPr/>
         </p:nvSpPr>
         <p:spPr>
           <a:xfrm>
-            <a:off x="9006840" y="4709160"/>
-            <a:ext cx="2834640" cy="1234440"/>
+            <a:off x="3017520" y="5321808"/>
+            <a:ext cx="3749039" cy="777240"/>
           </a:xfrm>
           <a:prstGeom prst="roundRect">
             <a:avLst>
-              <a:gd name="adj" fmla="val 20000"/>
+              <a:gd name="adj" fmla="val 10000"/>
             </a:avLst>
           </a:prstGeom>
           <a:solidFill>
-            <a:srgbClr val="009688"/>
+            <a:srgbClr val="002830"/>
           </a:solidFill>
-          <a:ln>
-            <a:noFill/>
+          <a:ln w="12700">
+            <a:solidFill>
+              <a:srgbClr val="00C8C8"/>
+            </a:solidFill>
           </a:ln>
         </p:spPr>
         <p:style>
@@ -4220,131 +4702,99 @@
           <a:bodyPr rtlCol="0" anchor="ctr" wrap="square"/>
           <a:lstStyle/>
           <a:p>
-            <a:pPr algn="ctr"/>
-            <a:r>
-              <a:rPr sz="1000" b="0">
-                <a:solidFill>
-                  <a:srgbClr val="FFFFFF"/>
-                </a:solidFill>
-              </a:rPr>
-              <a:t>🤖  Claude API
-claude-sonnet-4-6
-(Anthropic)</a:t>
-            </a:r>
-          </a:p>
-        </p:txBody>
-      </p:sp>
-      <p:cxnSp>
-        <p:nvCxnSpPr>
-          <p:cNvPr id="26" name="Connector 25"/>
-          <p:cNvCxnSpPr/>
+            <a:pPr algn="l"/>
+            <a:r>
+              <a:rPr sz="1000" b="1">
+                <a:solidFill>
+                  <a:srgbClr val="00C8C8"/>
+                </a:solidFill>
+                <a:latin typeface="Meiryo UI"/>
+              </a:rPr>
+              <a:t>Anthropic Claude API</a:t>
+            </a:r>
+          </a:p>
+          <a:p>
+            <a:pPr algn="l"/>
+            <a:r>
+              <a:rPr sz="750" b="0">
+                <a:solidFill>
+                  <a:srgbClr val="8AA8C0"/>
+                </a:solidFill>
+                <a:latin typeface="Meiryo UI"/>
+              </a:rPr>
+              <a:t>POST https://api.anthropic.com/v1/messages</a:t>
+            </a:r>
+          </a:p>
+          <a:p>
+            <a:pPr algn="l"/>
+            <a:r>
+              <a:rPr sz="750" b="0">
+                <a:solidFill>
+                  <a:srgbClr val="F8D266"/>
+                </a:solidFill>
+                <a:latin typeface="Consolas"/>
+              </a:rPr>
+              <a:t>lib: anthropic&gt;=0.40.0  |  model: claude-sonnet-4-6</a:t>
+            </a:r>
+          </a:p>
+        </p:txBody>
+      </p:sp>
+      <p:sp>
+        <p:nvSpPr>
+          <p:cNvPr id="28" name="Rectangle 27"/>
+          <p:cNvSpPr/>
           <p:nvPr/>
-        </p:nvCxnSpPr>
-        <p:spPr>
-          <a:xfrm>
-            <a:off x="2971800" y="1536192"/>
-            <a:ext cx="502920" cy="0"/>
-          </a:xfrm>
-          <a:prstGeom prst="line">
-            <a:avLst/>
+        </p:nvSpPr>
+        <p:spPr>
+          <a:xfrm>
+            <a:off x="3017520" y="566928"/>
+            <a:ext cx="3749039" cy="502920"/>
+          </a:xfrm>
+          <a:prstGeom prst="roundRect">
+            <a:avLst>
+              <a:gd name="adj" fmla="val 10000"/>
+            </a:avLst>
           </a:prstGeom>
-          <a:ln w="19050">
+          <a:solidFill>
+            <a:srgbClr val="1A0A35"/>
+          </a:solidFill>
+          <a:ln w="12700">
             <a:solidFill>
-              <a:srgbClr val="557799"/>
+              <a:srgbClr val="A05CFF"/>
             </a:solidFill>
-            <a:tailEnd type="none"/>
-            <a:headEnd type="arrow" w="med" len="med"/>
           </a:ln>
         </p:spPr>
         <p:style>
-          <a:lnRef idx="2">
+          <a:lnRef idx="1">
             <a:schemeClr val="accent1"/>
           </a:lnRef>
-          <a:fillRef idx="0">
+          <a:fillRef idx="3">
             <a:schemeClr val="accent1"/>
           </a:fillRef>
-          <a:effectRef idx="1">
+          <a:effectRef idx="2">
             <a:schemeClr val="accent1"/>
           </a:effectRef>
           <a:fontRef idx="minor">
-            <a:schemeClr val="tx1"/>
+            <a:schemeClr val="lt1"/>
           </a:fontRef>
         </p:style>
-      </p:cxnSp>
-      <p:cxnSp>
-        <p:nvCxnSpPr>
-          <p:cNvPr id="27" name="Connector 26"/>
-          <p:cNvCxnSpPr/>
-          <p:nvPr/>
-        </p:nvCxnSpPr>
-        <p:spPr>
-          <a:xfrm>
-            <a:off x="2971800" y="2359152"/>
-            <a:ext cx="502920" cy="0"/>
-          </a:xfrm>
-          <a:prstGeom prst="line">
-            <a:avLst/>
-          </a:prstGeom>
-          <a:ln w="19050">
-            <a:solidFill>
-              <a:srgbClr val="557799"/>
-            </a:solidFill>
-            <a:tailEnd type="none"/>
-            <a:headEnd type="arrow" w="med" len="med"/>
-          </a:ln>
-        </p:spPr>
-        <p:style>
-          <a:lnRef idx="2">
-            <a:schemeClr val="accent1"/>
-          </a:lnRef>
-          <a:fillRef idx="0">
-            <a:schemeClr val="accent1"/>
-          </a:fillRef>
-          <a:effectRef idx="1">
-            <a:schemeClr val="accent1"/>
-          </a:effectRef>
-          <a:fontRef idx="minor">
-            <a:schemeClr val="tx1"/>
-          </a:fontRef>
-        </p:style>
-      </p:cxnSp>
-      <p:cxnSp>
-        <p:nvCxnSpPr>
-          <p:cNvPr id="28" name="Connector 27"/>
-          <p:cNvCxnSpPr/>
-          <p:nvPr/>
-        </p:nvCxnSpPr>
-        <p:spPr>
-          <a:xfrm>
-            <a:off x="2971800" y="3456432"/>
-            <a:ext cx="502920" cy="0"/>
-          </a:xfrm>
-          <a:prstGeom prst="line">
-            <a:avLst/>
-          </a:prstGeom>
-          <a:ln w="19050">
-            <a:solidFill>
-              <a:srgbClr val="557799"/>
-            </a:solidFill>
-            <a:tailEnd type="none"/>
-            <a:headEnd type="arrow" w="med" len="med"/>
-          </a:ln>
-        </p:spPr>
-        <p:style>
-          <a:lnRef idx="2">
-            <a:schemeClr val="accent1"/>
-          </a:lnRef>
-          <a:fillRef idx="0">
-            <a:schemeClr val="accent1"/>
-          </a:fillRef>
-          <a:effectRef idx="1">
-            <a:schemeClr val="accent1"/>
-          </a:effectRef>
-          <a:fontRef idx="minor">
-            <a:schemeClr val="tx1"/>
-          </a:fontRef>
-        </p:style>
-      </p:cxnSp>
+        <p:txBody>
+          <a:bodyPr rtlCol="0" anchor="ctr" wrap="square"/>
+          <a:lstStyle/>
+          <a:p>
+            <a:pPr algn="l"/>
+            <a:r>
+              <a:rPr sz="800" b="1">
+                <a:solidFill>
+                  <a:srgbClr val="A05CFF"/>
+                </a:solidFill>
+                <a:latin typeface="Meiryo UI"/>
+              </a:rPr>
+              <a:t>GitHub Actions  |  ubuntu-latest  |  Python 3.12  |  cron: '0 22 * * *' UTC  =  JST 07:00</a:t>
+            </a:r>
+          </a:p>
+        </p:txBody>
+      </p:sp>
       <p:cxnSp>
         <p:nvCxnSpPr>
           <p:cNvPr id="29" name="Connector 28"/>
@@ -4353,18 +4803,18 @@
         </p:nvCxnSpPr>
         <p:spPr>
           <a:xfrm>
-            <a:off x="2971800" y="4279392"/>
-            <a:ext cx="502920" cy="0"/>
+            <a:off x="2624328" y="1252728"/>
+            <a:ext cx="393192" cy="0"/>
           </a:xfrm>
           <a:prstGeom prst="line">
             <a:avLst/>
           </a:prstGeom>
           <a:ln w="19050">
             <a:solidFill>
-              <a:srgbClr val="557799"/>
+              <a:srgbClr val="298FFF"/>
             </a:solidFill>
+            <a:headEnd type="arrow" w="med" len="med"/>
             <a:tailEnd type="none"/>
-            <a:headEnd type="arrow" w="med" len="med"/>
           </a:ln>
         </p:spPr>
         <p:style>
@@ -4389,19 +4839,19 @@
           <p:nvPr/>
         </p:nvCxnSpPr>
         <p:spPr>
-          <a:xfrm flipV="1">
-            <a:off x="6675120" y="2377440"/>
-            <a:ext cx="2331720" cy="2112264"/>
+          <a:xfrm>
+            <a:off x="2624328" y="1984248"/>
+            <a:ext cx="393192" cy="0"/>
           </a:xfrm>
           <a:prstGeom prst="line">
             <a:avLst/>
           </a:prstGeom>
-          <a:ln w="25400">
+          <a:ln w="19050">
             <a:solidFill>
-              <a:srgbClr val="F57C00"/>
+              <a:srgbClr val="298FFF"/>
             </a:solidFill>
+            <a:headEnd type="arrow" w="med" len="med"/>
             <a:tailEnd type="none"/>
-            <a:headEnd type="arrow" w="med" len="med"/>
           </a:ln>
         </p:spPr>
         <p:style>
@@ -4426,19 +4876,19 @@
           <p:nvPr/>
         </p:nvCxnSpPr>
         <p:spPr>
-          <a:xfrm flipV="1">
-            <a:off x="5074920" y="4818888"/>
-            <a:ext cx="0" cy="438912"/>
+          <a:xfrm>
+            <a:off x="2624328" y="2852928"/>
+            <a:ext cx="393192" cy="0"/>
           </a:xfrm>
           <a:prstGeom prst="line">
             <a:avLst/>
           </a:prstGeom>
-          <a:ln w="25400">
+          <a:ln w="19050">
             <a:solidFill>
-              <a:srgbClr val="6A1B9A"/>
+              <a:srgbClr val="298FFF"/>
             </a:solidFill>
+            <a:headEnd type="arrow" w="med" len="med"/>
             <a:tailEnd type="none"/>
-            <a:headEnd type="arrow" w="med" len="med"/>
           </a:ln>
         </p:spPr>
         <p:style>
@@ -4464,18 +4914,18 @@
         </p:nvCxnSpPr>
         <p:spPr>
           <a:xfrm>
-            <a:off x="2971800" y="5596128"/>
-            <a:ext cx="502920" cy="0"/>
+            <a:off x="2624328" y="3584448"/>
+            <a:ext cx="393192" cy="0"/>
           </a:xfrm>
           <a:prstGeom prst="line">
             <a:avLst/>
           </a:prstGeom>
           <a:ln w="19050">
             <a:solidFill>
-              <a:srgbClr val="7890A8"/>
+              <a:srgbClr val="298FFF"/>
             </a:solidFill>
+            <a:headEnd type="arrow" w="med" len="med"/>
             <a:tailEnd type="none"/>
-            <a:headEnd type="arrow" w="med" len="med"/>
           </a:ln>
         </p:spPr>
         <p:style>
@@ -4500,19 +4950,19 @@
           <p:nvPr/>
         </p:nvCxnSpPr>
         <p:spPr>
-          <a:xfrm flipH="1" flipV="1">
-            <a:off x="7315200" y="3392424"/>
-            <a:ext cx="1691640" cy="1911096"/>
+          <a:xfrm flipV="1">
+            <a:off x="4892040" y="3931920"/>
+            <a:ext cx="0" cy="1389888"/>
           </a:xfrm>
           <a:prstGeom prst="line">
             <a:avLst/>
           </a:prstGeom>
-          <a:ln w="25400">
+          <a:ln w="19050">
             <a:solidFill>
-              <a:srgbClr val="009688"/>
+              <a:srgbClr val="00C8C8"/>
             </a:solidFill>
+            <a:headEnd type="arrow" w="med" len="med"/>
             <a:tailEnd type="none"/>
-            <a:headEnd type="arrow" w="med" len="med"/>
           </a:ln>
         </p:spPr>
         <p:style>
@@ -4538,18 +4988,18 @@
         </p:nvCxnSpPr>
         <p:spPr>
           <a:xfrm>
-            <a:off x="6675120" y="3392424"/>
-            <a:ext cx="2331720" cy="1728216"/>
+            <a:off x="4892040" y="3931920"/>
+            <a:ext cx="0" cy="1389888"/>
           </a:xfrm>
           <a:prstGeom prst="line">
             <a:avLst/>
           </a:prstGeom>
-          <a:ln w="19050">
+          <a:ln w="15240">
             <a:solidFill>
-              <a:srgbClr val="009688"/>
+              <a:srgbClr val="00C8C8"/>
             </a:solidFill>
+            <a:headEnd type="arrow" w="med" len="med"/>
             <a:tailEnd type="none"/>
-            <a:headEnd type="arrow" w="med" len="med"/>
           </a:ln>
         </p:spPr>
         <p:style>
@@ -4567,16 +5017,127 @@
           </a:fontRef>
         </p:style>
       </p:cxnSp>
-      <p:sp>
-        <p:nvSpPr>
-          <p:cNvPr id="35" name="TextBox 34"/>
+      <p:cxnSp>
+        <p:nvCxnSpPr>
+          <p:cNvPr id="35" name="Connector 34"/>
+          <p:cNvCxnSpPr/>
+          <p:nvPr/>
+        </p:nvCxnSpPr>
+        <p:spPr>
+          <a:xfrm flipV="1">
+            <a:off x="6766560" y="1645920"/>
+            <a:ext cx="2212848" cy="3035808"/>
+          </a:xfrm>
+          <a:prstGeom prst="line">
+            <a:avLst/>
+          </a:prstGeom>
+          <a:ln w="25400">
+            <a:solidFill>
+              <a:srgbClr val="FF7A00"/>
+            </a:solidFill>
+            <a:headEnd type="arrow" w="med" len="med"/>
+            <a:tailEnd type="none"/>
+          </a:ln>
+        </p:spPr>
+        <p:style>
+          <a:lnRef idx="2">
+            <a:schemeClr val="accent1"/>
+          </a:lnRef>
+          <a:fillRef idx="0">
+            <a:schemeClr val="accent1"/>
+          </a:fillRef>
+          <a:effectRef idx="1">
+            <a:schemeClr val="accent1"/>
+          </a:effectRef>
+          <a:fontRef idx="minor">
+            <a:schemeClr val="tx1"/>
+          </a:fontRef>
+        </p:style>
+      </p:cxnSp>
+      <p:cxnSp>
+        <p:nvCxnSpPr>
+          <p:cNvPr id="36" name="Connector 35"/>
+          <p:cNvCxnSpPr/>
+          <p:nvPr/>
+        </p:nvCxnSpPr>
+        <p:spPr>
+          <a:xfrm flipV="1">
+            <a:off x="4892040" y="960120"/>
+            <a:ext cx="0" cy="109728"/>
+          </a:xfrm>
+          <a:prstGeom prst="line">
+            <a:avLst/>
+          </a:prstGeom>
+          <a:ln w="22860">
+            <a:solidFill>
+              <a:srgbClr val="A05CFF"/>
+            </a:solidFill>
+            <a:headEnd type="arrow" w="med" len="med"/>
+            <a:tailEnd type="none"/>
+          </a:ln>
+        </p:spPr>
+        <p:style>
+          <a:lnRef idx="2">
+            <a:schemeClr val="accent1"/>
+          </a:lnRef>
+          <a:fillRef idx="0">
+            <a:schemeClr val="accent1"/>
+          </a:fillRef>
+          <a:effectRef idx="1">
+            <a:schemeClr val="accent1"/>
+          </a:effectRef>
+          <a:fontRef idx="minor">
+            <a:schemeClr val="tx1"/>
+          </a:fontRef>
+        </p:style>
+      </p:cxnSp>
+      <p:cxnSp>
+        <p:nvCxnSpPr>
+          <p:cNvPr id="37" name="Connector 36"/>
+          <p:cNvCxnSpPr/>
+          <p:nvPr/>
+        </p:nvCxnSpPr>
+        <p:spPr>
+          <a:xfrm flipH="1">
+            <a:off x="6766560" y="4206240"/>
+            <a:ext cx="2212848" cy="320040"/>
+          </a:xfrm>
+          <a:prstGeom prst="line">
+            <a:avLst/>
+          </a:prstGeom>
+          <a:ln w="15240">
+            <a:solidFill>
+              <a:srgbClr val="648CAA"/>
+            </a:solidFill>
+            <a:headEnd type="arrow" w="med" len="med"/>
+            <a:tailEnd type="none"/>
+          </a:ln>
+        </p:spPr>
+        <p:style>
+          <a:lnRef idx="2">
+            <a:schemeClr val="accent1"/>
+          </a:lnRef>
+          <a:fillRef idx="0">
+            <a:schemeClr val="accent1"/>
+          </a:fillRef>
+          <a:effectRef idx="1">
+            <a:schemeClr val="accent1"/>
+          </a:effectRef>
+          <a:fontRef idx="minor">
+            <a:schemeClr val="tx1"/>
+          </a:fontRef>
+        </p:style>
+      </p:cxnSp>
+      <p:sp>
+        <p:nvSpPr>
+          <p:cNvPr id="38" name="TextBox 37"/>
           <p:cNvSpPr txBox="1"/>
           <p:nvPr/>
         </p:nvSpPr>
         <p:spPr>
           <a:xfrm>
-            <a:off x="6720840" y="4160520"/>
-            <a:ext cx="2194560" cy="274320"/>
+            <a:off x="5943600" y="4572000"/>
+            <a:ext cx="2743200" cy="256032"/>
           </a:xfrm>
           <a:prstGeom prst="rect">
             <a:avLst/>
@@ -4584,34 +5145,34 @@
           <a:noFill/>
         </p:spPr>
         <p:txBody>
-          <a:bodyPr wrap="square">
+          <a:bodyPr wrap="none">
             <a:spAutoFit/>
           </a:bodyPr>
           <a:lstStyle/>
           <a:p>
             <a:pPr algn="ctr"/>
             <a:r>
-              <a:rPr sz="750" b="0">
-                <a:solidFill>
-                  <a:srgbClr val="009688"/>
-                </a:solidFill>
-              </a:rPr>
-              <a:t>要約・重複排除・
-重要度ソート</a:t>
-            </a:r>
-          </a:p>
-        </p:txBody>
-      </p:sp>
-      <p:sp>
-        <p:nvSpPr>
-          <p:cNvPr id="36" name="TextBox 35"/>
+              <a:rPr sz="750">
+                <a:solidFill>
+                  <a:srgbClr val="FF7A00"/>
+                </a:solidFill>
+                <a:latin typeface="Meiryo UI"/>
+              </a:rPr>
+              <a:t>MIME multipart email</a:t>
+            </a:r>
+          </a:p>
+        </p:txBody>
+      </p:sp>
+      <p:sp>
+        <p:nvSpPr>
+          <p:cNvPr id="39" name="TextBox 38"/>
           <p:cNvSpPr txBox="1"/>
           <p:nvPr/>
         </p:nvSpPr>
         <p:spPr>
           <a:xfrm>
-            <a:off x="7132320" y="2606040"/>
-            <a:ext cx="1828800" cy="274320"/>
+            <a:off x="6903720" y="3977639"/>
+            <a:ext cx="1828800" cy="256032"/>
           </a:xfrm>
           <a:prstGeom prst="rect">
             <a:avLst/>
@@ -4619,33 +5180,34 @@
           <a:noFill/>
         </p:spPr>
         <p:txBody>
-          <a:bodyPr wrap="square">
+          <a:bodyPr wrap="none">
             <a:spAutoFit/>
           </a:bodyPr>
           <a:lstStyle/>
           <a:p>
             <a:pPr algn="ctr"/>
             <a:r>
-              <a:rPr sz="750" b="0">
-                <a:solidFill>
-                  <a:srgbClr val="F57C00"/>
-                </a:solidFill>
-              </a:rPr>
-              <a:t>メール本文</a:t>
-            </a:r>
-          </a:p>
-        </p:txBody>
-      </p:sp>
-      <p:sp>
-        <p:nvSpPr>
-          <p:cNvPr id="37" name="TextBox 36"/>
+              <a:rPr sz="700">
+                <a:solidFill>
+                  <a:srgbClr val="648CAA"/>
+                </a:solidFill>
+                <a:latin typeface="Meiryo UI"/>
+              </a:rPr>
+              <a:t>env vars inject</a:t>
+            </a:r>
+          </a:p>
+        </p:txBody>
+      </p:sp>
+      <p:sp>
+        <p:nvSpPr>
+          <p:cNvPr id="40" name="TextBox 39"/>
           <p:cNvSpPr txBox="1"/>
           <p:nvPr/>
         </p:nvSpPr>
         <p:spPr>
           <a:xfrm>
-            <a:off x="5120640" y="4983480"/>
-            <a:ext cx="1371600" cy="256032"/>
+            <a:off x="5074920" y="4846320"/>
+            <a:ext cx="1645920" cy="256032"/>
           </a:xfrm>
           <a:prstGeom prst="rect">
             <a:avLst/>
@@ -4653,33 +5215,35 @@
           <a:noFill/>
         </p:spPr>
         <p:txBody>
-          <a:bodyPr wrap="square">
+          <a:bodyPr wrap="none">
             <a:spAutoFit/>
           </a:bodyPr>
           <a:lstStyle/>
           <a:p>
             <a:pPr algn="ctr"/>
             <a:r>
-              <a:rPr sz="750" b="0">
-                <a:solidFill>
-                  <a:srgbClr val="6A1B9A"/>
-                </a:solidFill>
-              </a:rPr>
-              <a:t>毎朝トリガー</a:t>
-            </a:r>
-          </a:p>
-        </p:txBody>
-      </p:sp>
-      <p:sp>
-        <p:nvSpPr>
-          <p:cNvPr id="38" name="TextBox 37"/>
+              <a:rPr sz="700">
+                <a:solidFill>
+                  <a:srgbClr val="00C8C8"/>
+                </a:solidFill>
+                <a:latin typeface="Meiryo UI"/>
+              </a:rPr>
+              <a:t>HTTP/1.1 POST
+HTTP/1.1 200 OK</a:t>
+            </a:r>
+          </a:p>
+        </p:txBody>
+      </p:sp>
+      <p:sp>
+        <p:nvSpPr>
+          <p:cNvPr id="41" name="TextBox 40"/>
           <p:cNvSpPr txBox="1"/>
           <p:nvPr/>
         </p:nvSpPr>
         <p:spPr>
           <a:xfrm>
-            <a:off x="3017520" y="5349240"/>
-            <a:ext cx="1188720" cy="274320"/>
+            <a:off x="5074920" y="1005840"/>
+            <a:ext cx="2011680" cy="256032"/>
           </a:xfrm>
           <a:prstGeom prst="rect">
             <a:avLst/>
@@ -4687,42 +5251,45 @@
           <a:noFill/>
         </p:spPr>
         <p:txBody>
-          <a:bodyPr wrap="square">
+          <a:bodyPr wrap="none">
             <a:spAutoFit/>
           </a:bodyPr>
           <a:lstStyle/>
           <a:p>
             <a:pPr algn="ctr"/>
             <a:r>
-              <a:rPr sz="750" b="0">
-                <a:solidFill>
-                  <a:srgbClr val="7890A8"/>
-                </a:solidFill>
-              </a:rPr>
-              <a:t>認証情報注入</a:t>
-            </a:r>
-          </a:p>
-        </p:txBody>
-      </p:sp>
-      <p:sp>
-        <p:nvSpPr>
-          <p:cNvPr id="39" name="Rectangle 38"/>
+              <a:rPr sz="700">
+                <a:solidFill>
+                  <a:srgbClr val="A05CFF"/>
+                </a:solidFill>
+                <a:latin typeface="Meiryo UI"/>
+              </a:rPr>
+              <a:t>workflow_dispatch / schedule</a:t>
+            </a:r>
+          </a:p>
+        </p:txBody>
+      </p:sp>
+      <p:sp>
+        <p:nvSpPr>
+          <p:cNvPr id="42" name="Rectangle 41"/>
           <p:cNvSpPr/>
           <p:nvPr/>
         </p:nvSpPr>
         <p:spPr>
           <a:xfrm>
-            <a:off x="182880" y="6309360"/>
-            <a:ext cx="11887200" cy="457200"/>
+            <a:off x="0" y="6565392"/>
+            <a:ext cx="12188952" cy="292608"/>
           </a:xfrm>
           <a:prstGeom prst="rect">
             <a:avLst/>
           </a:prstGeom>
           <a:solidFill>
-            <a:srgbClr val="1B2A4A"/>
+            <a:srgbClr val="0A1420"/>
           </a:solidFill>
-          <a:ln>
-            <a:noFill/>
+          <a:ln w="3810">
+            <a:solidFill>
+              <a:srgbClr val="2A4565"/>
+            </a:solidFill>
           </a:ln>
         </p:spPr>
         <p:style>
@@ -4749,14 +5316,14 @@
       </p:sp>
       <p:sp>
         <p:nvSpPr>
-          <p:cNvPr id="40" name="TextBox 39"/>
+          <p:cNvPr id="43" name="TextBox 42"/>
           <p:cNvSpPr txBox="1"/>
           <p:nvPr/>
         </p:nvSpPr>
         <p:spPr>
           <a:xfrm>
-            <a:off x="457200" y="6373368"/>
-            <a:ext cx="1828800" cy="320040"/>
+            <a:off x="182880" y="6583680"/>
+            <a:ext cx="1828800" cy="256032"/>
           </a:xfrm>
           <a:prstGeom prst="rect">
             <a:avLst/>
@@ -4769,27 +5336,29 @@
           </a:bodyPr>
           <a:lstStyle/>
           <a:p>
-            <a:r>
-              <a:rPr sz="800">
-                <a:solidFill>
-                  <a:srgbClr val="2E6EC8"/>
-                </a:solidFill>
-              </a:rPr>
-              <a:t>■ RSSフィード（入力）</a:t>
-            </a:r>
-          </a:p>
-        </p:txBody>
-      </p:sp>
-      <p:sp>
-        <p:nvSpPr>
-          <p:cNvPr id="41" name="TextBox 40"/>
+            <a:pPr algn="ctr"/>
+            <a:r>
+              <a:rPr sz="750">
+                <a:solidFill>
+                  <a:srgbClr val="298FFF"/>
+                </a:solidFill>
+                <a:latin typeface="Meiryo UI"/>
+              </a:rPr>
+              <a:t>■ RSS Input</a:t>
+            </a:r>
+          </a:p>
+        </p:txBody>
+      </p:sp>
+      <p:sp>
+        <p:nvSpPr>
+          <p:cNvPr id="44" name="TextBox 43"/>
           <p:cNvSpPr txBox="1"/>
           <p:nvPr/>
         </p:nvSpPr>
         <p:spPr>
           <a:xfrm>
-            <a:off x="2560320" y="6373368"/>
-            <a:ext cx="1828800" cy="320040"/>
+            <a:off x="2011680" y="6583680"/>
+            <a:ext cx="1828800" cy="256032"/>
           </a:xfrm>
           <a:prstGeom prst="rect">
             <a:avLst/>
@@ -4802,27 +5371,29 @@
           </a:bodyPr>
           <a:lstStyle/>
           <a:p>
-            <a:r>
-              <a:rPr sz="800">
-                <a:solidFill>
-                  <a:srgbClr val="2E7D32"/>
-                </a:solidFill>
-              </a:rPr>
-              <a:t>■ 処理（Python）</a:t>
-            </a:r>
-          </a:p>
-        </p:txBody>
-      </p:sp>
-      <p:sp>
-        <p:nvSpPr>
-          <p:cNvPr id="42" name="TextBox 41"/>
+            <a:pPr algn="ctr"/>
+            <a:r>
+              <a:rPr sz="750">
+                <a:solidFill>
+                  <a:srgbClr val="00C87A"/>
+                </a:solidFill>
+                <a:latin typeface="Meiryo UI"/>
+              </a:rPr>
+              <a:t>■ Processing</a:t>
+            </a:r>
+          </a:p>
+        </p:txBody>
+      </p:sp>
+      <p:sp>
+        <p:nvSpPr>
+          <p:cNvPr id="45" name="TextBox 44"/>
           <p:cNvSpPr txBox="1"/>
           <p:nvPr/>
         </p:nvSpPr>
         <p:spPr>
           <a:xfrm>
-            <a:off x="4572000" y="6373368"/>
-            <a:ext cx="1828800" cy="320040"/>
+            <a:off x="3840480" y="6583680"/>
+            <a:ext cx="1828800" cy="256032"/>
           </a:xfrm>
           <a:prstGeom prst="rect">
             <a:avLst/>
@@ -4835,11 +5406,13 @@
           </a:bodyPr>
           <a:lstStyle/>
           <a:p>
-            <a:r>
-              <a:rPr sz="800">
-                <a:solidFill>
-                  <a:srgbClr val="009688"/>
-                </a:solidFill>
+            <a:pPr algn="ctr"/>
+            <a:r>
+              <a:rPr sz="750">
+                <a:solidFill>
+                  <a:srgbClr val="00C8C8"/>
+                </a:solidFill>
+                <a:latin typeface="Meiryo UI"/>
               </a:rPr>
               <a:t>■ Claude API</a:t>
             </a:r>
@@ -4848,14 +5421,14 @@
       </p:sp>
       <p:sp>
         <p:nvSpPr>
-          <p:cNvPr id="43" name="TextBox 42"/>
+          <p:cNvPr id="46" name="TextBox 45"/>
           <p:cNvSpPr txBox="1"/>
           <p:nvPr/>
         </p:nvSpPr>
         <p:spPr>
           <a:xfrm>
-            <a:off x="6583680" y="6373368"/>
-            <a:ext cx="1828800" cy="320040"/>
+            <a:off x="5669280" y="6583680"/>
+            <a:ext cx="1828800" cy="256032"/>
           </a:xfrm>
           <a:prstGeom prst="rect">
             <a:avLst/>
@@ -4868,27 +5441,29 @@
           </a:bodyPr>
           <a:lstStyle/>
           <a:p>
-            <a:r>
-              <a:rPr sz="800">
-                <a:solidFill>
-                  <a:srgbClr val="F57C00"/>
-                </a:solidFill>
-              </a:rPr>
-              <a:t>■ Gmail（出力）</a:t>
-            </a:r>
-          </a:p>
-        </p:txBody>
-      </p:sp>
-      <p:sp>
-        <p:nvSpPr>
-          <p:cNvPr id="44" name="TextBox 43"/>
+            <a:pPr algn="ctr"/>
+            <a:r>
+              <a:rPr sz="750">
+                <a:solidFill>
+                  <a:srgbClr val="FF7A00"/>
+                </a:solidFill>
+                <a:latin typeface="Meiryo UI"/>
+              </a:rPr>
+              <a:t>■ Gmail Output</a:t>
+            </a:r>
+          </a:p>
+        </p:txBody>
+      </p:sp>
+      <p:sp>
+        <p:nvSpPr>
+          <p:cNvPr id="47" name="TextBox 46"/>
           <p:cNvSpPr txBox="1"/>
           <p:nvPr/>
         </p:nvSpPr>
         <p:spPr>
           <a:xfrm>
-            <a:off x="8595360" y="6373368"/>
-            <a:ext cx="1828800" cy="320040"/>
+            <a:off x="7498079" y="6583680"/>
+            <a:ext cx="1828800" cy="256032"/>
           </a:xfrm>
           <a:prstGeom prst="rect">
             <a:avLst/>
@@ -4901,11 +5476,13 @@
           </a:bodyPr>
           <a:lstStyle/>
           <a:p>
-            <a:r>
-              <a:rPr sz="800">
-                <a:solidFill>
-                  <a:srgbClr val="6A1B9A"/>
-                </a:solidFill>
+            <a:pPr algn="ctr"/>
+            <a:r>
+              <a:rPr sz="750">
+                <a:solidFill>
+                  <a:srgbClr val="A05CFF"/>
+                </a:solidFill>
+                <a:latin typeface="Meiryo UI"/>
               </a:rPr>
               <a:t>■ GitHub Actions</a:t>
             </a:r>
@@ -4914,14 +5491,14 @@
       </p:sp>
       <p:sp>
         <p:nvSpPr>
-          <p:cNvPr id="45" name="TextBox 44"/>
+          <p:cNvPr id="48" name="TextBox 47"/>
           <p:cNvSpPr txBox="1"/>
           <p:nvPr/>
         </p:nvSpPr>
         <p:spPr>
           <a:xfrm>
-            <a:off x="10332720" y="6373368"/>
-            <a:ext cx="1828800" cy="320040"/>
+            <a:off x="9601200" y="6583680"/>
+            <a:ext cx="1828800" cy="256032"/>
           </a:xfrm>
           <a:prstGeom prst="rect">
             <a:avLst/>
@@ -4934,13 +5511,50 @@
           </a:bodyPr>
           <a:lstStyle/>
           <a:p>
-            <a:r>
-              <a:rPr sz="800">
-                <a:solidFill>
-                  <a:srgbClr val="7890A8"/>
-                </a:solidFill>
+            <a:pPr algn="ctr"/>
+            <a:r>
+              <a:rPr sz="750">
+                <a:solidFill>
+                  <a:srgbClr val="648CAA"/>
+                </a:solidFill>
+                <a:latin typeface="Meiryo UI"/>
               </a:rPr>
               <a:t>■ GitHub Secrets</a:t>
+            </a:r>
+          </a:p>
+        </p:txBody>
+      </p:sp>
+      <p:sp>
+        <p:nvSpPr>
+          <p:cNvPr id="49" name="TextBox 48"/>
+          <p:cNvSpPr txBox="1"/>
+          <p:nvPr/>
+        </p:nvSpPr>
+        <p:spPr>
+          <a:xfrm>
+            <a:off x="11155680" y="6583680"/>
+            <a:ext cx="1828800" cy="256032"/>
+          </a:xfrm>
+          <a:prstGeom prst="rect">
+            <a:avLst/>
+          </a:prstGeom>
+          <a:noFill/>
+        </p:spPr>
+        <p:txBody>
+          <a:bodyPr wrap="none">
+            <a:spAutoFit/>
+          </a:bodyPr>
+          <a:lstStyle/>
+          <a:p>
+            <a:pPr algn="ctr"/>
+            <a:r>
+              <a:rPr sz="750">
+                <a:solidFill>
+                  <a:srgbClr val="F8D266"/>
+                </a:solidFill>
+                <a:latin typeface="Meiryo UI"/>
+              </a:rPr>
+              <a:t>■ Code / Config</a:t>
             </a:r>
           </a:p>
         </p:txBody>
